--- a/산출물/실전반/이론_오프라인/02회차/실전반_오프라인_02회차.pptx
+++ b/산출물/실전반/이론_오프라인/02회차/실전반_오프라인_02회차.pptx
@@ -552,11 +552,6 @@
           </a:p>
           <a:p>
             <a:r>
-              <a:t>· 이론은 온라인 과정과 같은 교재의 장에서 오늘 실습에 쓰는 것만</a:t>
-            </a:r>
-          </a:p>
-          <a:p>
-            <a:r>
               <a:t>[다음] 학습목표</a:t>
             </a:r>
           </a:p>
@@ -1527,7 +1522,7 @@
           </a:p>
           <a:p>
             <a:r>
-              <a:t>· 실습의 경계값 · 제외와 누락이 겹친 입력 · 모두 제외된 입력 검증이 이 단원을 쓴다</a:t>
+              <a:t>· 여러 행이 함께 맞을 때의 처리 → 값을 못 읽었을 때의 처리 → 걸린 규칙과 그때의 값을 근거로 남기기</a:t>
             </a:r>
           </a:p>
           <a:p>
@@ -1607,12 +1602,12 @@
           </a:p>
           <a:p>
             <a:r>
-              <a:t>· 1 답할 질문: 「이 부품을 쓰는 설비와 공급 조건은?」 — 조회문과 반복 적재 확인의 출발</a:t>
-            </a:r>
-          </a:p>
-          <a:p>
-            <a:r>
-              <a:t>· 2 조건표: 「원격 자동일 때만」 같은 조건을 입력 · 연산자 · 기준값의 행으로 → 판정 기능의 바탕</a:t>
+              <a:t>· 1 답할 질문: 「이 부품을 쓰는 설비와 공급 조건은?」에서 정의를 고르고, 다시 넣어도 하나로 남긴다</a:t>
+            </a:r>
+          </a:p>
+          <a:p>
+            <a:r>
+              <a:t>· 2 조건표: 「원격 자동일 때만」 같은 조건을 입력 · 연산자 · 기준값의 행으로 → 제외 · 감점 · 경고를 가른다</a:t>
             </a:r>
           </a:p>
           <a:p>
@@ -2107,7 +2102,7 @@
           </a:p>
           <a:p>
             <a:r>
-              <a:t>· 남은 후보 비교: 순위 정책 하나를 Unique로 — 후보를 하나로 줄인다는 뜻이 아니라 적용할 정책이 하나라는 뜻. 무엇으로 견주는지(성과 · 비용)는 이 단원의 뒤 장에서</a:t>
+              <a:t>· 남은 후보 비교: 순위 정책 하나를 Unique로(Unique = 한 입력에 맞는 행이 하나뿐이어야 하는 방식) — 후보를 하나로 줄인다는 뜻이 아니라 적용할 정책이 하나라는 뜻. 무엇으로 견주는지(성과 · 비용)는 이 단원의 뒤 장에서</a:t>
             </a:r>
           </a:p>
           <a:p>
@@ -3492,7 +3487,7 @@
           </a:p>
           <a:p>
             <a:r>
-              <a:t>· 실습에서 부품별 사용 설비와 공급 조건을 돌려주는 적재 · 조회문을 쓰고 원자료와 대조한다</a:t>
+              <a:t>· 역량 질문 → 클래스 · 속성 · 관계 → 공급 관계의 값과 공급사의 값 → 비승인 공급사 → 다시 넣어도 하나로 → 적재 검증</a:t>
             </a:r>
           </a:p>
           <a:p>
@@ -3973,6 +3968,11 @@
           <a:p>
             <a:r>
               <a:t>[짚을 곳] 흐름 다섯 칸: 앞 둘(준비) → 뒤 셋(넣고 확인) → 강조한 검사</a:t>
+            </a:r>
+          </a:p>
+          <a:p>
+            <a:r>
+              <a:t>· 스키마 = 클래스 · 속성 · 관계 · 제약을 일관되게 정한 지식 구조의 정의, 제약 = 데이터가 지켜야 할 조건으로 어긋난 데이터를 가려내는 기준(유일 제약은 같은 식별자가 둘 생기지 않게)</a:t>
             </a:r>
           </a:p>
           <a:p>
@@ -7915,7 +7915,7 @@
       </p:sp>
       <p:pic>
         <p:nvPicPr>
-          <p:cNvPr id="6" name="삽화:조치후보_전체.svg" descr="illust_811729109515311572_1793113376.png"/>
+          <p:cNvPr id="6" name="삽화:조치후보_전체.svg" descr="illust_589598579319954630_1793113376.png"/>
           <p:cNvPicPr>
             <a:picLocks noChangeAspect="1"/>
           </p:cNvPicPr>
